--- a/word-drafts/figures/WoTCon-Fig1-RegistryAndProjection.pptx
+++ b/word-drafts/figures/WoTCon-Fig1-RegistryAndProjection.pptx
@@ -3870,7 +3870,7 @@
         <p:spPr>
           <a:xfrm>
             <a:off x="2195512" y="4657725"/>
-            <a:ext cx="485775" cy="123825"/>
+            <a:ext cx="561975" cy="123825"/>
           </a:xfrm>
           <a:prstGeom prst="rect">
             <a:avLst/>
@@ -3941,7 +3941,7 @@
         <p:spPr>
           <a:xfrm>
             <a:off x="3481387" y="4543425"/>
-            <a:ext cx="609600" cy="123825"/>
+            <a:ext cx="733425" cy="123825"/>
           </a:xfrm>
           <a:prstGeom prst="rect">
             <a:avLst/>
@@ -4050,7 +4050,7 @@
         <p:spPr>
           <a:xfrm>
             <a:off x="2838450" y="6829425"/>
-            <a:ext cx="285750" cy="123825"/>
+            <a:ext cx="314325" cy="123825"/>
           </a:xfrm>
           <a:prstGeom prst="rect">
             <a:avLst/>
@@ -4122,7 +4122,7 @@
         <p:spPr>
           <a:xfrm>
             <a:off x="2838450" y="3571875"/>
-            <a:ext cx="533400" cy="123825"/>
+            <a:ext cx="685800" cy="123825"/>
           </a:xfrm>
           <a:prstGeom prst="rect">
             <a:avLst/>
@@ -4193,7 +4193,7 @@
         <p:spPr>
           <a:xfrm>
             <a:off x="3481387" y="3457575"/>
-            <a:ext cx="704850" cy="123825"/>
+            <a:ext cx="885825" cy="123825"/>
           </a:xfrm>
           <a:prstGeom prst="rect">
             <a:avLst/>
@@ -4264,7 +4264,7 @@
         <p:spPr>
           <a:xfrm>
             <a:off x="2838450" y="3714750"/>
-            <a:ext cx="781050" cy="123825"/>
+            <a:ext cx="981075" cy="123825"/>
           </a:xfrm>
           <a:prstGeom prst="rect">
             <a:avLst/>
